--- a/docs/midnight-mcp-manual.pptx
+++ b/docs/midnight-mcp-manual.pptx
@@ -7876,7 +7876,7 @@
                   <a:srgbClr val="FFFFFF"/>
                 </a:solidFill>
               </a:rPr>
-              <a:t>ZKPで「送金が正当」という</a:t>
+              <a:t>金額・残高実値・saltを秘匿</a:t>
             </a:r>
             <a:endParaRPr lang="en-US" sz="1400" dirty="0"/>
           </a:p>
@@ -7890,21 +7890,7 @@
                   <a:srgbClr val="FFFFFF"/>
                 </a:solidFill>
               </a:rPr>
-              <a:t>事実だけを記録</a:t>
-            </a:r>
-            <a:endParaRPr lang="en-US" sz="1400" dirty="0"/>
-          </a:p>
-          <a:p>
-            <a:pPr indent="0" marL="0">
-              <a:buNone/>
-            </a:pPr>
-            <a:r>
-              <a:rPr lang="en-US" sz="1300" dirty="0">
-                <a:solidFill>
-                  <a:srgbClr val="FFFFFF"/>
-                </a:solidFill>
-              </a:rPr>
-              <a:t>金額・相手先は非公開</a:t>
+              <a:t>送信者・受取人の公開鍵は公開</a:t>
             </a:r>
             <a:endParaRPr lang="en-US" sz="1400" dirty="0"/>
           </a:p>
@@ -7999,7 +7985,7 @@
                 <a:ea typeface="Consolas" pitchFamily="34" charset="-122"/>
                 <a:cs typeface="Consolas" pitchFamily="34" charset="-120"/>
               </a:rPr>
-              <a:t>Compact言語で、送金額と送金先を非公開にした</a:t>
+              <a:t>金額と残高実値を非公開にし、両者の公開鍵を公開する</a:t>
             </a:r>
             <a:endParaRPr lang="en-US" sz="1100" dirty="0"/>
           </a:p>
@@ -8016,7 +8002,7 @@
                 <a:ea typeface="Consolas" pitchFamily="34" charset="-122"/>
                 <a:cs typeface="Consolas" pitchFamily="34" charset="-120"/>
               </a:rPr>
-              <a:t>プライベート決済コントラクトを作成してください</a:t>
+              <a:t>残高更新コントラクトを作成してください</a:t>
             </a:r>
             <a:endParaRPr lang="en-US" sz="1100" dirty="0"/>
           </a:p>
@@ -8599,7 +8585,7 @@
                   <a:srgbClr val="CCCCCC"/>
                 </a:solidFill>
               </a:rPr>
-              <a:t>秘密鍵・送金額・</a:t>
+              <a:t>秘密鍵・送金額・saltは秘匿</a:t>
             </a:r>
             <a:endParaRPr lang="en-US" sz="1200" dirty="0"/>
           </a:p>
@@ -8613,7 +8599,7 @@
                   <a:srgbClr val="CCCCCC"/>
                 </a:solidFill>
               </a:rPr>
-              <a:t>送金先はチェーンに</a:t>
+              <a:t>受取人公開鍵は</a:t>
             </a:r>
             <a:endParaRPr lang="en-US" sz="1200" dirty="0"/>
           </a:p>
@@ -8627,7 +8613,7 @@
                   <a:srgbClr val="CCCCCC"/>
                 </a:solidFill>
               </a:rPr>
-              <a:t>絶対に乗らない</a:t>
+              <a:t>disclose()で公開</a:t>
             </a:r>
             <a:endParaRPr lang="en-US" sz="1200" dirty="0"/>
           </a:p>
@@ -8789,7 +8775,7 @@
                   <a:srgbClr val="FFFFFF"/>
                 </a:solidFill>
               </a:rPr>
-              <a:t> → 残高登録（公開）</a:t>
+              <a:t> → 公開額で残高更新</a:t>
             </a:r>
             <a:endParaRPr lang="en-US" sz="1100" dirty="0"/>
           </a:p>
@@ -8823,7 +8809,7 @@
                   <a:srgbClr val="FFFFFF"/>
                 </a:solidFill>
               </a:rPr>
-              <a:t> → ZKP送金（非公開）</a:t>
+              <a:t> → 金額秘匿・公開鍵公開</a:t>
             </a:r>
             <a:endParaRPr lang="en-US" sz="1100" dirty="0"/>
           </a:p>
@@ -8857,7 +8843,7 @@
                   <a:srgbClr val="FFFFFF"/>
                 </a:solidFill>
               </a:rPr>
-              <a:t> → 残高確認（非公開）</a:t>
+              <a:t> → 残高を公開</a:t>
             </a:r>
             <a:endParaRPr lang="en-US" sz="1100" dirty="0"/>
           </a:p>
